--- a/slides/202606-InfoEnvAssetMarkets-EF.pptx
+++ b/slides/202606-InfoEnvAssetMarkets-EF.pptx
@@ -233,7 +233,7 @@
           <a:p>
             <a:fld id="{F6CA57C3-BE43-4B51-9A49-3B5D6A82629B}" type="datetimeFigureOut">
               <a:rPr lang="en-FI" smtClean="0"/>
-              <a:t>15/06/2026</a:t>
+              <a:t>31/08/2026</a:t>
             </a:fld>
             <a:endParaRPr lang="en-FI"/>
           </a:p>
@@ -905,18 +905,7 @@
           <a:bodyPr/>
           <a:lstStyle/>
           <a:p>
-            <a:r>
-              <a:rPr lang="en-FI" dirty="0"/>
-              <a:t>(say: </a:t>
-            </a:r>
-            <a:r>
-              <a:rPr lang="en-FI" i="1" dirty="0"/>
-              <a:t>this is the whole engine of the paper</a:t>
-            </a:r>
-            <a:r>
-              <a:rPr lang="en-FI" dirty="0"/>
-              <a:t>)</a:t>
-            </a:r>
+            <a:endParaRPr lang="en-FI" dirty="0"/>
           </a:p>
         </p:txBody>
       </p:sp>
@@ -1018,10 +1007,7 @@
           <a:bodyPr/>
           <a:lstStyle/>
           <a:p>
-            <a:r>
-              <a:rPr lang="en-FI" dirty="0"/>
-              <a:t>both produce BIASED BELIEFS – but in OPPOSITE DIRECTIONS</a:t>
-            </a:r>
+            <a:endParaRPr lang="en-FI" dirty="0"/>
           </a:p>
         </p:txBody>
       </p:sp>
@@ -1129,10 +1115,7 @@
           <a:bodyPr/>
           <a:lstStyle/>
           <a:p>
-            <a:r>
-              <a:rPr lang="en-FI" dirty="0"/>
-              <a:t>both produce BIASED BELIEFS – but in OPPOSITE DIRECTIONS</a:t>
-            </a:r>
+            <a:endParaRPr lang="en-FI" dirty="0"/>
           </a:p>
         </p:txBody>
       </p:sp>
@@ -1222,40 +1205,6 @@
           <a:bodyPr/>
           <a:lstStyle/>
           <a:p>
-            <a:r>
-              <a:rPr lang="en-FI" dirty="0"/>
-              <a:t>Why cross them	</a:t>
-            </a:r>
-          </a:p>
-          <a:p>
-            <a:r>
-              <a:rPr lang="en-FI" dirty="0"/>
-              <a:t>- Belief heterogeneity → speculative trade</a:t>
-            </a:r>
-          </a:p>
-          <a:p>
-            <a:r>
-              <a:rPr lang="en-FI" dirty="0"/>
-              <a:t>- Concentrated portfolios → rebalancing trade</a:t>
-            </a:r>
-          </a:p>
-          <a:p>
-            <a:r>
-              <a:rPr lang="en-FI" dirty="0"/>
-              <a:t>- Cross the two → read off how much of volume is </a:t>
-            </a:r>
-            <a:r>
-              <a:rPr lang="en-FI" i="1" dirty="0"/>
-              <a:t>which</a:t>
-            </a:r>
-          </a:p>
-          <a:p>
-            <a:r>
-              <a:rPr lang="en-FI" dirty="0"/>
-              <a:t>— and whether they interact</a:t>
-            </a:r>
-          </a:p>
-          <a:p>
             <a:endParaRPr lang="en-FI" dirty="0"/>
           </a:p>
         </p:txBody>
@@ -1340,18 +1289,7 @@
           <a:bodyPr/>
           <a:lstStyle/>
           <a:p>
-            <a:r>
-              <a:rPr lang="en-FI" dirty="0"/>
-              <a:t>[visual: the 3×2 grid, shaded </a:t>
-            </a:r>
-            <a:r>
-              <a:rPr lang="en-FI" dirty="0" err="1"/>
-              <a:t>dark→light</a:t>
-            </a:r>
-            <a:r>
-              <a:rPr lang="en-FI" dirty="0"/>
-              <a:t> by predicted volume]</a:t>
-            </a:r>
+            <a:endParaRPr lang="en-FI" dirty="0"/>
           </a:p>
         </p:txBody>
       </p:sp>
@@ -1603,10 +1541,6 @@
           <a:bodyPr/>
           <a:lstStyle/>
           <a:p>
-            <a:r>
-              <a:rPr lang="en-FI" i="1" dirty="0"/>
-              <a:t>[Drop your pilot result here — I don't have your numbers. Frame it honestly:]</a:t>
-            </a:r>
             <a:endParaRPr lang="en-FI" dirty="0"/>
           </a:p>
         </p:txBody>
@@ -1796,7 +1730,7 @@
           <a:p>
             <a:fld id="{D60F697F-2730-4AF1-88F7-BB1B5F8ECCC5}" type="datetime8">
               <a:rPr lang="en-FI" smtClean="0"/>
-              <a:t>15/06/2026 13.20</a:t>
+              <a:t>31/08/2026 9.18</a:t>
             </a:fld>
             <a:endParaRPr lang="en-FI"/>
           </a:p>
@@ -1996,7 +1930,7 @@
           <a:p>
             <a:fld id="{765332EC-6693-4479-8497-E8CCAAB88D5B}" type="datetime8">
               <a:rPr lang="en-FI" smtClean="0"/>
-              <a:t>15/06/2026 13.20</a:t>
+              <a:t>31/08/2026 9.18</a:t>
             </a:fld>
             <a:endParaRPr lang="en-FI"/>
           </a:p>
@@ -2206,7 +2140,7 @@
           <a:p>
             <a:fld id="{CB4E75B0-FA21-4C76-B00D-5B7164D8CFDF}" type="datetime8">
               <a:rPr lang="en-FI" smtClean="0"/>
-              <a:t>15/06/2026 13.20</a:t>
+              <a:t>31/08/2026 9.18</a:t>
             </a:fld>
             <a:endParaRPr lang="en-FI"/>
           </a:p>
@@ -2406,7 +2340,7 @@
           <a:p>
             <a:fld id="{10363FF8-ED89-4AF3-A2FE-D455646C1744}" type="datetime8">
               <a:rPr lang="en-FI" smtClean="0"/>
-              <a:t>15/06/2026 13.20</a:t>
+              <a:t>31/08/2026 9.18</a:t>
             </a:fld>
             <a:endParaRPr lang="en-FI"/>
           </a:p>
@@ -2682,7 +2616,7 @@
           <a:p>
             <a:fld id="{3EE024B3-6FB9-4AE8-9853-11C2601275AE}" type="datetime8">
               <a:rPr lang="en-FI" smtClean="0"/>
-              <a:t>15/06/2026 13.20</a:t>
+              <a:t>31/08/2026 9.18</a:t>
             </a:fld>
             <a:endParaRPr lang="en-FI"/>
           </a:p>
@@ -2950,7 +2884,7 @@
           <a:p>
             <a:fld id="{097E8D9D-52F1-435C-B12C-46A0776D0450}" type="datetime8">
               <a:rPr lang="en-FI" smtClean="0"/>
-              <a:t>15/06/2026 13.20</a:t>
+              <a:t>31/08/2026 9.18</a:t>
             </a:fld>
             <a:endParaRPr lang="en-FI"/>
           </a:p>
@@ -3365,7 +3299,7 @@
           <a:p>
             <a:fld id="{1EAEA497-A4AD-4D4F-B443-B927F927B306}" type="datetime8">
               <a:rPr lang="en-FI" smtClean="0"/>
-              <a:t>15/06/2026 13.20</a:t>
+              <a:t>31/08/2026 9.18</a:t>
             </a:fld>
             <a:endParaRPr lang="en-FI"/>
           </a:p>
@@ -3507,7 +3441,7 @@
           <a:p>
             <a:fld id="{E54815E1-4BD7-48C1-B167-0869006FCC53}" type="datetime8">
               <a:rPr lang="en-FI" smtClean="0"/>
-              <a:t>15/06/2026 13.20</a:t>
+              <a:t>31/08/2026 9.18</a:t>
             </a:fld>
             <a:endParaRPr lang="en-FI"/>
           </a:p>
@@ -3620,7 +3554,7 @@
           <a:p>
             <a:fld id="{1089290C-887C-4D09-BC54-90A5B54F007A}" type="datetime8">
               <a:rPr lang="en-FI" smtClean="0"/>
-              <a:t>15/06/2026 13.20</a:t>
+              <a:t>31/08/2026 9.18</a:t>
             </a:fld>
             <a:endParaRPr lang="en-FI"/>
           </a:p>
@@ -3933,7 +3867,7 @@
           <a:p>
             <a:fld id="{CC2A6404-15A4-4A90-A564-1B2D473123EE}" type="datetime8">
               <a:rPr lang="en-FI" smtClean="0"/>
-              <a:t>15/06/2026 13.20</a:t>
+              <a:t>31/08/2026 9.18</a:t>
             </a:fld>
             <a:endParaRPr lang="en-FI"/>
           </a:p>
@@ -4222,7 +4156,7 @@
           <a:p>
             <a:fld id="{22FA9757-DCED-4989-8E53-11E599DB1443}" type="datetime8">
               <a:rPr lang="en-FI" smtClean="0"/>
-              <a:t>15/06/2026 13.20</a:t>
+              <a:t>31/08/2026 9.18</a:t>
             </a:fld>
             <a:endParaRPr lang="en-FI"/>
           </a:p>
@@ -4465,7 +4399,7 @@
           <a:p>
             <a:fld id="{2D17385D-3822-4684-B617-F7228FD759B8}" type="datetime8">
               <a:rPr lang="en-FI" smtClean="0"/>
-              <a:t>15/06/2026 13.20</a:t>
+              <a:t>31/08/2026 9.18</a:t>
             </a:fld>
             <a:endParaRPr lang="en-FI"/>
           </a:p>
@@ -13103,8 +13037,8 @@
           </a:p>
         </p:txBody>
       </p:sp>
-      <mc:AlternateContent xmlns:mc="http://schemas.openxmlformats.org/markup-compatibility/2006">
-        <mc:Choice xmlns:a14="http://schemas.microsoft.com/office/drawing/2010/main" Requires="a14">
+      <mc:AlternateContent xmlns:mc="http://schemas.openxmlformats.org/markup-compatibility/2006" xmlns:a14="http://schemas.microsoft.com/office/drawing/2010/main">
+        <mc:Choice Requires="a14">
           <p:sp>
             <p:nvSpPr>
               <p:cNvPr id="3" name="Content Placeholder 2">
@@ -13227,7 +13161,7 @@
             </p:txBody>
           </p:sp>
         </mc:Choice>
-        <mc:Fallback>
+        <mc:Fallback xmlns="">
           <p:sp>
             <p:nvSpPr>
               <p:cNvPr id="3" name="Content Placeholder 2">
